--- a/заняття_15/Словники_в_Python.pptx
+++ b/заняття_15/Словники_в_Python.pptx
@@ -3922,7 +3922,7 @@
         <p:spPr>
           <a:xfrm>
             <a:off x="804672" y="1737360"/>
-            <a:ext cx="3566160" cy="2240280"/>
+            <a:ext cx="3749040" cy="2240280"/>
           </a:xfrm>
           <a:prstGeom prst="rect">
             <a:avLst/>
